--- a/curso/pptx/S83.pptx
+++ b/curso/pptx/S83.pptx
@@ -4281,7 +4281,7 @@
                 </a:solidFill>
                 <a:latin typeface="Nunito Sans"/>
               </a:rPr>
-              <a:t>LGTBI:</a:t>
+              <a:t>LGTBI：</a:t>
             </a:r>
             <a:r>
               <a:rPr sz="2800" b="0">
@@ -4290,7 +4290,7 @@
                 </a:solidFill>
                 <a:latin typeface="Nunito Sans"/>
               </a:rPr>
-              <a:t> lesbianas, gais, trans, bisexuales e intersexuales</a:t>
+              <a:t>女同性恋、男同性恋、跨性别、双性恋和间性人</a:t>
             </a:r>
           </a:p>
           <a:p>
@@ -4315,7 +4315,7 @@
                 </a:solidFill>
                 <a:latin typeface="Nunito Sans"/>
               </a:rPr>
-              <a:t>Intersexual:</a:t>
+              <a:t>间性人：</a:t>
             </a:r>
             <a:r>
               <a:rPr sz="2800" b="0">
@@ -4324,7 +4324,7 @@
                 </a:solidFill>
                 <a:latin typeface="Nunito Sans"/>
               </a:rPr>
-              <a:t> cuerpo no del todo típico de hombre ni de mujer</a:t>
+              <a:t>身体既不完全是典型的男性，也不完全是典型的女性</a:t>
             </a:r>
           </a:p>
           <a:p>
@@ -4349,7 +4349,7 @@
                 </a:solidFill>
                 <a:latin typeface="Nunito Sans"/>
               </a:rPr>
-              <a:t>Es una forma de </a:t>
+              <a:t>这是一种</a:t>
             </a:r>
             <a:r>
               <a:rPr sz="2800" b="1">
@@ -4358,7 +4358,7 @@
                 </a:solidFill>
                 <a:latin typeface="Nunito Sans"/>
               </a:rPr>
-              <a:t>exclusión</a:t>
+              <a:t>排斥</a:t>
             </a:r>
             <a:r>
               <a:rPr sz="2800" b="0">
@@ -4367,7 +4367,7 @@
                 </a:solidFill>
                 <a:latin typeface="Nunito Sans"/>
               </a:rPr>
-              <a:t>: dejar a alguien fuera</a:t>
+              <a:t>：把某人排除在外</a:t>
             </a:r>
           </a:p>
           <a:p>
@@ -4392,7 +4392,7 @@
                 </a:solidFill>
                 <a:latin typeface="Nunito Sans"/>
               </a:rPr>
-              <a:t>Como vimos en la 第66课: «</a:t>
+              <a:t>就像我们在第66课看到的：“</a:t>
             </a:r>
             <a:r>
               <a:rPr sz="2800" b="1">
@@ -4401,7 +4401,7 @@
                 </a:solidFill>
                 <a:latin typeface="Nunito Sans"/>
               </a:rPr>
-              <a:t>nosotros</a:t>
+              <a:t>我们</a:t>
             </a:r>
             <a:r>
               <a:rPr sz="2800" b="0">
@@ -4410,7 +4410,7 @@
                 </a:solidFill>
                 <a:latin typeface="Nunito Sans"/>
               </a:rPr>
-              <a:t>» frente a «</a:t>
+              <a:t>”对“</a:t>
             </a:r>
             <a:r>
               <a:rPr sz="2800" b="1">
@@ -4419,7 +4419,7 @@
                 </a:solidFill>
                 <a:latin typeface="Nunito Sans"/>
               </a:rPr>
-              <a:t>ellos</a:t>
+              <a:t>他们</a:t>
             </a:r>
             <a:r>
               <a:rPr sz="2800" b="0">
@@ -4428,7 +4428,7 @@
                 </a:solidFill>
                 <a:latin typeface="Nunito Sans"/>
               </a:rPr>
-              <a:t>»</a:t>
+              <a:t>”</a:t>
             </a:r>
           </a:p>
         </p:txBody>
@@ -4662,7 +4662,7 @@
                 </a:solidFill>
                 <a:latin typeface="Nunito Sans"/>
               </a:rPr>
-              <a:t>Usar «gay» como insulto</a:t>
+              <a:t>把“同性恋”当作侮辱</a:t>
             </a:r>
           </a:p>
           <a:p>
@@ -4687,7 +4687,7 @@
                 </a:solidFill>
                 <a:latin typeface="Nunito Sans"/>
               </a:rPr>
-              <a:t>Reírse de cómo viste o habla alguien</a:t>
+              <a:t>嘲笑别人的穿着或说话方式</a:t>
             </a:r>
           </a:p>
           <a:p>
@@ -4712,7 +4712,7 @@
                 </a:solidFill>
                 <a:latin typeface="Nunito Sans"/>
               </a:rPr>
-              <a:t>Adivinar y contar la orientación de otro</a:t>
+              <a:t>猜测并说出别人的性取向</a:t>
             </a:r>
           </a:p>
           <a:p>
@@ -4737,7 +4737,7 @@
                 </a:solidFill>
                 <a:latin typeface="Nunito Sans"/>
               </a:rPr>
-              <a:t>«Solo era una broma»</a:t>
+              <a:t>“只是个玩笑”</a:t>
             </a:r>
           </a:p>
         </p:txBody>
@@ -4867,7 +4867,7 @@
                 </a:solidFill>
                 <a:latin typeface="Nunito Sans"/>
               </a:rPr>
-              <a:t>Llamar a cada persona por el nombre que pide</a:t>
+              <a:t>按每个人要求的名字称呼他</a:t>
             </a:r>
           </a:p>
           <a:p>
@@ -4892,7 +4892,7 @@
                 </a:solidFill>
                 <a:latin typeface="Nunito Sans"/>
               </a:rPr>
-              <a:t>Tratar a todos igual en el grupo</a:t>
+              <a:t>在群体里平等地对待所有人</a:t>
             </a:r>
           </a:p>
           <a:p>
@@ -4917,7 +4917,7 @@
                 </a:solidFill>
                 <a:latin typeface="Nunito Sans"/>
               </a:rPr>
-              <a:t>Dejar que cada uno cuente lo suyo, si quiere</a:t>
+              <a:t>让每个人自己决定要不要说自己的事</a:t>
             </a:r>
           </a:p>
           <a:p>
@@ -4942,7 +4942,7 @@
                 </a:solidFill>
                 <a:latin typeface="Nunito Sans"/>
               </a:rPr>
-              <a:t>No reírse con quien se burla</a:t>
+              <a:t>不要跟着嘲笑的人一起笑</a:t>
             </a:r>
           </a:p>
         </p:txBody>
@@ -7397,7 +7397,7 @@
                 </a:solidFill>
                 <a:latin typeface="Nunito Sans"/>
               </a:rPr>
-              <a:t>Heterosexual:</a:t>
+              <a:t>异性恋：</a:t>
             </a:r>
             <a:r>
               <a:rPr sz="2800" b="0">
@@ -7406,7 +7406,7 @@
                 </a:solidFill>
                 <a:latin typeface="Nunito Sans"/>
               </a:rPr>
-              <a:t> hacia personas del otro sexo</a:t>
+              <a:t>对异性</a:t>
             </a:r>
           </a:p>
           <a:p>
@@ -7431,7 +7431,7 @@
                 </a:solidFill>
                 <a:latin typeface="Nunito Sans"/>
               </a:rPr>
-              <a:t>Homosexual</a:t>
+              <a:t>同性恋</a:t>
             </a:r>
             <a:r>
               <a:rPr sz="2800" b="0">
@@ -7440,7 +7440,7 @@
                 </a:solidFill>
                 <a:latin typeface="Nunito Sans"/>
               </a:rPr>
-              <a:t> (gay o lesbiana): hacia personas del mismo sexo</a:t>
+              <a:t>（男同或女同）：对同性</a:t>
             </a:r>
           </a:p>
           <a:p>
@@ -7465,7 +7465,7 @@
                 </a:solidFill>
                 <a:latin typeface="Nunito Sans"/>
               </a:rPr>
-              <a:t>Bisexual:</a:t>
+              <a:t>双性恋：</a:t>
             </a:r>
             <a:r>
               <a:rPr sz="2800" b="0">
@@ -7474,7 +7474,7 @@
                 </a:solidFill>
                 <a:latin typeface="Nunito Sans"/>
               </a:rPr>
-              <a:t> hacia personas de más de un sexo</a:t>
+              <a:t>对不止一种性别的人</a:t>
             </a:r>
           </a:p>
           <a:p>
@@ -7499,7 +7499,7 @@
                 </a:solidFill>
                 <a:latin typeface="Nunito Sans"/>
               </a:rPr>
-              <a:t>No se elige como un gusto y </a:t>
+              <a:t>它不像爱好那样可以选择，而且</a:t>
             </a:r>
             <a:r>
               <a:rPr sz="2800" b="1">
@@ -7508,7 +7508,7 @@
                 </a:solidFill>
                 <a:latin typeface="Nunito Sans"/>
               </a:rPr>
-              <a:t>no es una enfermedad</a:t>
+              <a:t>不是一种疾病</a:t>
             </a:r>
           </a:p>
         </p:txBody>
@@ -7742,7 +7742,7 @@
                 </a:solidFill>
                 <a:latin typeface="Nunito Sans"/>
               </a:rPr>
-              <a:t>Persona cis:</a:t>
+              <a:t>顺性别者：</a:t>
             </a:r>
             <a:r>
               <a:rPr sz="2800" b="0">
@@ -7751,7 +7751,7 @@
                 </a:solidFill>
                 <a:latin typeface="Nunito Sans"/>
               </a:rPr>
-              <a:t> su identidad coincide con el sexo asignado al nacer</a:t>
+              <a:t>性别认同与出生时被指定的性别一致</a:t>
             </a:r>
           </a:p>
           <a:p>
@@ -7776,7 +7776,7 @@
                 </a:solidFill>
                 <a:latin typeface="Nunito Sans"/>
               </a:rPr>
-              <a:t>Persona trans:</a:t>
+              <a:t>跨性别者：</a:t>
             </a:r>
             <a:r>
               <a:rPr sz="2800" b="0">
@@ -7785,7 +7785,7 @@
                 </a:solidFill>
                 <a:latin typeface="Nunito Sans"/>
               </a:rPr>
-              <a:t> su identidad no coincide con el sexo asignado al nacer</a:t>
+              <a:t>性别认同与出生时被指定的性别不一致</a:t>
             </a:r>
           </a:p>
           <a:p>
@@ -7810,7 +7810,7 @@
                 </a:solidFill>
                 <a:latin typeface="Nunito Sans"/>
               </a:rPr>
-              <a:t>Orientación e identidad son </a:t>
+              <a:t>取向和认同是</a:t>
             </a:r>
             <a:r>
               <a:rPr sz="2800" b="1">
@@ -7819,7 +7819,7 @@
                 </a:solidFill>
                 <a:latin typeface="Nunito Sans"/>
               </a:rPr>
-              <a:t>cosas distintas</a:t>
+              <a:t>不同的东西</a:t>
             </a:r>
           </a:p>
         </p:txBody>
@@ -8071,7 +8071,7 @@
                 </a:solidFill>
                 <a:latin typeface="Nunito Sans"/>
               </a:rPr>
-              <a:t>Callarse o no decir «no» </a:t>
+              <a:t>沉默或没有说“不”</a:t>
             </a:r>
             <a:r>
               <a:rPr sz="2800" b="1">
@@ -8080,7 +8080,7 @@
                 </a:solidFill>
                 <a:latin typeface="Nunito Sans"/>
               </a:rPr>
-              <a:t>no</a:t>
+              <a:t>不等于</a:t>
             </a:r>
             <a:r>
               <a:rPr sz="2800" b="0">
@@ -8089,7 +8089,7 @@
                 </a:solidFill>
                 <a:latin typeface="Nunito Sans"/>
               </a:rPr>
-              <a:t> es un sí</a:t>
+              <a:t>“愿意”</a:t>
             </a:r>
           </a:p>
           <a:p>
@@ -8114,7 +8114,7 @@
                 </a:solidFill>
                 <a:latin typeface="Nunito Sans"/>
               </a:rPr>
-              <a:t>Con presión, miedo o engaño no hay acuerdo </a:t>
+              <a:t>在压力、恐惧或欺骗之下，就没有</a:t>
             </a:r>
             <a:r>
               <a:rPr sz="2800" b="1">
@@ -8123,7 +8123,16 @@
                 </a:solidFill>
                 <a:latin typeface="Nunito Sans"/>
               </a:rPr>
-              <a:t>libre</a:t>
+              <a:t>自由的</a:t>
+            </a:r>
+            <a:r>
+              <a:rPr sz="2800" b="0">
+                <a:solidFill>
+                  <a:srgbClr val="1F2A44"/>
+                </a:solidFill>
+                <a:latin typeface="Nunito Sans"/>
+              </a:rPr>
+              <a:t>同意</a:t>
             </a:r>
           </a:p>
           <a:p>
@@ -8148,7 +8157,7 @@
                 </a:solidFill>
                 <a:latin typeface="Nunito Sans"/>
               </a:rPr>
-              <a:t>Se puede </a:t>
+              <a:t>可以在任何时候</a:t>
             </a:r>
             <a:r>
               <a:rPr sz="2800" b="1">
@@ -8157,7 +8166,23 @@
                 </a:solidFill>
                 <a:latin typeface="Nunito Sans"/>
               </a:rPr>
-              <a:t>cambiar de opinión</a:t>
+              <a:t>改变主意</a:t>
+            </a:r>
+          </a:p>
+          <a:p>
+            <a:pPr>
+              <a:spcAft>
+                <a:spcPts val="1260"/>
+              </a:spcAft>
+            </a:pPr>
+            <a:r>
+              <a:rPr sz="2800" b="1">
+                <a:solidFill>
+                  <a:srgbClr val="E8793A"/>
+                </a:solidFill>
+                <a:latin typeface="Nunito Sans"/>
+              </a:rPr>
+              <a:t>• </a:t>
             </a:r>
             <a:r>
               <a:rPr sz="2800" b="0">
@@ -8166,41 +8191,16 @@
                 </a:solidFill>
                 <a:latin typeface="Nunito Sans"/>
               </a:rPr>
-              <a:t> en cualquier momento</a:t>
-            </a:r>
-          </a:p>
-          <a:p>
-            <a:pPr>
-              <a:spcAft>
-                <a:spcPts val="1260"/>
-              </a:spcAft>
-            </a:pPr>
+              <a:t>适用于一个吻、一个拥抱或</a:t>
+            </a:r>
             <a:r>
               <a:rPr sz="2800" b="1">
                 <a:solidFill>
-                  <a:srgbClr val="E8793A"/>
-                </a:solidFill>
-                <a:latin typeface="Nunito Sans"/>
-              </a:rPr>
-              <a:t>• </a:t>
-            </a:r>
-            <a:r>
-              <a:rPr sz="2800" b="0">
-                <a:solidFill>
-                  <a:srgbClr val="1F2A44"/>
-                </a:solidFill>
-                <a:latin typeface="Nunito Sans"/>
-              </a:rPr>
-              <a:t>Vale para un beso, un abrazo o </a:t>
-            </a:r>
-            <a:r>
-              <a:rPr sz="2800" b="1">
-                <a:solidFill>
-                  <a:srgbClr val="1F2A44"/>
-                </a:solidFill>
-                <a:latin typeface="Nunito Sans"/>
-              </a:rPr>
-              <a:t>una foto</a:t>
+                  <a:srgbClr val="1F2A44"/>
+                </a:solidFill>
+                <a:latin typeface="Nunito Sans"/>
+              </a:rPr>
+              <a:t>一张照片</a:t>
             </a:r>
           </a:p>
         </p:txBody>

--- a/curso/pptx/S83.pptx
+++ b/curso/pptx/S83.pptx
@@ -5128,7 +5128,7 @@
                 </a:solidFill>
                 <a:latin typeface="Nunito Sans"/>
               </a:rPr>
-              <a:t>在更衣室里，Aitor 传球失误，有人对他喊“你真像个同性恋！”。后来那人说只是个玩笑。</a:t>
+              <a:t>在更衣室里，一个男孩传球失误，有人对他喊“你真像个同性恋！”。后来那人说只是个玩笑。</a:t>
             </a:r>
           </a:p>
         </p:txBody>
@@ -5201,7 +5201,7 @@
                 </a:solidFill>
                 <a:latin typeface="Nunito Sans"/>
               </a:rPr>
-              <a:t>它伤害了谁？伤害了 Aitor，也伤害了任何听到这话的同性恋者，即使他们不出声。</a:t>
+              <a:t>它伤害了谁？伤害了这个男孩，也伤害了任何听到这话的同性恋者，即使他们不出声。</a:t>
             </a:r>
           </a:p>
           <a:p>
@@ -5437,7 +5437,7 @@
                 </a:solidFill>
                 <a:latin typeface="Nunito Sans"/>
               </a:rPr>
-              <a:t>Kevin 看到一个歌手涂着指甲油的视频，评论说：“看得出来他是同性恋。”</a:t>
+              <a:t>一个男孩看到一个歌手涂着指甲油的视频，评论说：“看得出来他是同性恋。”</a:t>
             </a:r>
           </a:p>
         </p:txBody>
@@ -8386,7 +8386,7 @@
                 </a:solidFill>
                 <a:latin typeface="Nunito Sans"/>
               </a:rPr>
-              <a:t>Naiara 在和 Iker 交往时给他发过一张私密照片。现在他们分手了，Iker 想把它转发到朋友群里。</a:t>
+              <a:t>一个女孩在和一个男孩交往时给他发过一张私密照片。现在他们分手了，这个男孩想把它转发到朋友群里。</a:t>
             </a:r>
           </a:p>
         </p:txBody>
@@ -8434,7 +8434,7 @@
                 </a:solidFill>
                 <a:latin typeface="Nunito Sans"/>
               </a:rPr>
-              <a:t>Naiara 允许别人看了吗？没有：她只发给了 Iker。</a:t>
+              <a:t>这个女孩允许别人看了吗？没有：她只发给了这个男孩。</a:t>
             </a:r>
           </a:p>
           <a:p>
@@ -8527,7 +8527,7 @@
                 </a:solidFill>
                 <a:latin typeface="Nunito Sans"/>
               </a:rPr>
-              <a:t>结论：没有 Naiara 明确的“愿意”，就不能转发。而且她可以改变主意。</a:t>
+              <a:t>结论：没有这个女孩明确的“愿意”，就不能转发。而且她可以改变主意。</a:t>
             </a:r>
           </a:p>
         </p:txBody>
